--- a/dist/초3/수학/도형과측정/초3_수학_도형과측정_07_무게.pptx
+++ b/dist/초3/수학/도형과측정/초3_수학_도형과측정_07_무게.pptx
@@ -122,13 +122,13 @@
   <p:extLst>
     <p:ext uri="{521415D9-36F7-43E2-AB2F-B90AF26B5E84}">
       <p14:sectionLst xmlns:p14="http://schemas.microsoft.com/office/powerpoint/2010/main">
-        <p14:section name="도입" id="{696dc782-5700-9673-50b7-2bd77d300d01}">
+        <p14:section name="도입" id="{5ef1a8e7-c725-c67e-9c58-2fd4b7d1e3bf}">
           <p14:sldIdLst>
             <p14:sldId id="256"/>
             <p14:sldId id="257"/>
           </p14:sldIdLst>
         </p14:section>
-        <p14:section name="개념" id="{6e53c87d-7b9b-eea0-8d62-d011aaffa2f5}">
+        <p14:section name="개념" id="{c0f75647-0181-3e03-2f30-412908b595e6}">
           <p14:sldIdLst>
             <p14:sldId id="258"/>
             <p14:sldId id="259"/>
@@ -138,32 +138,32 @@
             <p14:sldId id="265"/>
           </p14:sldIdLst>
         </p14:section>
-        <p14:section name="연습" id="{729769ce-8f13-fecf-98a8-3c3f3d58e3b0}">
+        <p14:section name="연습" id="{79ace1ee-77a7-2465-15ec-297ffbaa58e1}">
           <p14:sldIdLst>
             <p14:sldId id="262"/>
             <p14:sldId id="263"/>
             <p14:sldId id="266"/>
           </p14:sldIdLst>
         </p14:section>
-        <p14:section name="개념" id="{da75f023-b84a-b2eb-b2f8-f78c66343c4f}">
+        <p14:section name="개념" id="{3607a26c-c99b-079a-8415-b1a2b7d20660}">
           <p14:sldIdLst/>
         </p14:section>
-        <p14:section name="연습" id="{dd8c0e75-9101-4e95-de5e-0b64b3e91a39}">
+        <p14:section name="연습" id="{cdca0a1e-e560-e227-4125-2d03182efeb3}">
           <p14:sldIdLst/>
         </p14:section>
-        <p14:section name="확인" id="{5bac4d78-378b-08da-96a9-22693224d537}">
+        <p14:section name="확인" id="{6ec9841e-2968-9cf0-4258-1dfc15633592}">
           <p14:sldIdLst>
             <p14:sldId id="267"/>
             <p14:sldId id="268"/>
             <p14:sldId id="269"/>
           </p14:sldIdLst>
         </p14:section>
-        <p14:section name="정리" id="{774ff4b5-c58b-e2c1-816e-cea7f5b6eebb}">
+        <p14:section name="정리" id="{a20d0d03-91ae-bad1-36c0-c5e58a5491ee}">
           <p14:sldIdLst>
             <p14:sldId id="270"/>
           </p14:sldIdLst>
         </p14:section>
-        <p14:section name="보충" id="{1b1c051e-75bd-c8c2-750a-b5291f08ced2}">
+        <p14:section name="보충" id="{eba5950c-6233-60ac-7307-4d3e51a338e5}">
           <p14:sldIdLst>
             <p14:sldId id="271"/>
           </p14:sldIdLst>
@@ -3806,8 +3806,8 @@
         </p:nvSpPr>
         <p:spPr>
           <a:xfrm>
-            <a:off x="9491472" y="1171956"/>
-            <a:ext cx="310896" cy="381000"/>
+            <a:off x="9545955" y="1275143"/>
+            <a:ext cx="201930" cy="174625"/>
           </a:xfrm>
           <a:prstGeom prst="rect">
             <a:avLst/>
@@ -3823,7 +3823,7 @@
               <a:buNone/>
             </a:pPr>
             <a:r>
-              <a:rPr lang="ko-KR" altLang="en-US" sz="2400" b="1" dirty="0">
+              <a:rPr lang="ko-KR" altLang="en-US" sz="1100" b="1" dirty="0">
                 <a:solidFill>
                   <a:srgbClr val="1F2937"/>
                 </a:solidFill>
@@ -3833,7 +3833,7 @@
               </a:rPr>
               <a:t>0</a:t>
             </a:r>
-            <a:endParaRPr lang="ko-KR" sz="2400" dirty="0"/>
+            <a:endParaRPr lang="ko-KR" sz="1100" dirty="0"/>
           </a:p>
         </p:txBody>
       </p:sp>
@@ -3845,8 +3845,8 @@
         </p:nvSpPr>
         <p:spPr>
           <a:xfrm>
-            <a:off x="10030968" y="1912620"/>
-            <a:ext cx="713232" cy="381000"/>
+            <a:off x="10194417" y="2015807"/>
+            <a:ext cx="386334" cy="174625"/>
           </a:xfrm>
           <a:prstGeom prst="rect">
             <a:avLst/>
@@ -3862,7 +3862,7 @@
               <a:buNone/>
             </a:pPr>
             <a:r>
-              <a:rPr lang="ko-KR" altLang="en-US" sz="2400" b="1" dirty="0">
+              <a:rPr lang="ko-KR" altLang="en-US" sz="1100" b="1" dirty="0">
                 <a:solidFill>
                   <a:srgbClr val="1F2937"/>
                 </a:solidFill>
@@ -3872,7 +3872,7 @@
               </a:rPr>
               <a:t>500</a:t>
             </a:r>
-            <a:endParaRPr lang="ko-KR" sz="2400" dirty="0"/>
+            <a:endParaRPr lang="ko-KR" sz="1100" dirty="0"/>
           </a:p>
         </p:txBody>
       </p:sp>
@@ -3884,8 +3884,8 @@
         </p:nvSpPr>
         <p:spPr>
           <a:xfrm>
-            <a:off x="9189720" y="2653284"/>
-            <a:ext cx="914400" cy="381000"/>
+            <a:off x="9407652" y="2756472"/>
+            <a:ext cx="478536" cy="174625"/>
           </a:xfrm>
           <a:prstGeom prst="rect">
             <a:avLst/>
@@ -3901,7 +3901,7 @@
               <a:buNone/>
             </a:pPr>
             <a:r>
-              <a:rPr lang="ko-KR" altLang="en-US" sz="2400" b="1" dirty="0">
+              <a:rPr lang="ko-KR" altLang="en-US" sz="1100" b="1" dirty="0">
                 <a:solidFill>
                   <a:srgbClr val="1F2937"/>
                 </a:solidFill>
@@ -3911,7 +3911,7 @@
               </a:rPr>
               <a:t>1000</a:t>
             </a:r>
-            <a:endParaRPr lang="ko-KR" sz="2400" dirty="0"/>
+            <a:endParaRPr lang="ko-KR" sz="1100" dirty="0"/>
           </a:p>
         </p:txBody>
       </p:sp>
@@ -3923,8 +3923,8 @@
         </p:nvSpPr>
         <p:spPr>
           <a:xfrm>
-            <a:off x="8449056" y="1912620"/>
-            <a:ext cx="914400" cy="381000"/>
+            <a:off x="8666988" y="2015807"/>
+            <a:ext cx="478536" cy="174625"/>
           </a:xfrm>
           <a:prstGeom prst="rect">
             <a:avLst/>
@@ -3940,7 +3940,7 @@
               <a:buNone/>
             </a:pPr>
             <a:r>
-              <a:rPr lang="ko-KR" altLang="en-US" sz="2400" b="1" dirty="0">
+              <a:rPr lang="ko-KR" altLang="en-US" sz="1100" b="1" dirty="0">
                 <a:solidFill>
                   <a:srgbClr val="1F2937"/>
                 </a:solidFill>
@@ -3950,7 +3950,7 @@
               </a:rPr>
               <a:t>1500</a:t>
             </a:r>
-            <a:endParaRPr lang="ko-KR" sz="2400" dirty="0"/>
+            <a:endParaRPr lang="ko-KR" sz="1100" dirty="0"/>
           </a:p>
         </p:txBody>
       </p:sp>
@@ -3962,8 +3962,8 @@
         </p:nvSpPr>
         <p:spPr>
           <a:xfrm>
-            <a:off x="9323832" y="1528572"/>
-            <a:ext cx="646176" cy="381000"/>
+            <a:off x="9469120" y="1631759"/>
+            <a:ext cx="355600" cy="174625"/>
           </a:xfrm>
           <a:prstGeom prst="rect">
             <a:avLst/>
@@ -3979,7 +3979,7 @@
               <a:buNone/>
             </a:pPr>
             <a:r>
-              <a:rPr lang="en-US" altLang="ko-KR" sz="2400" b="1" dirty="0">
+              <a:rPr lang="en-US" altLang="ko-KR" sz="1100" b="1" dirty="0">
                 <a:solidFill>
                   <a:srgbClr val="1F2937"/>
                 </a:solidFill>
@@ -3989,7 +3989,7 @@
               </a:rPr>
               <a:t>(g)</a:t>
             </a:r>
-            <a:endParaRPr lang="ko-KR" sz="2400" dirty="0"/>
+            <a:endParaRPr lang="ko-KR" sz="1100" dirty="0"/>
           </a:p>
         </p:txBody>
       </p:sp>

--- a/dist/초3/수학/도형과측정/초3_수학_도형과측정_07_무게.pptx
+++ b/dist/초3/수학/도형과측정/초3_수학_도형과측정_07_무게.pptx
@@ -122,13 +122,13 @@
   <p:extLst>
     <p:ext uri="{521415D9-36F7-43E2-AB2F-B90AF26B5E84}">
       <p14:sectionLst xmlns:p14="http://schemas.microsoft.com/office/powerpoint/2010/main">
-        <p14:section name="도입" id="{5ef1a8e7-c725-c67e-9c58-2fd4b7d1e3bf}">
+        <p14:section name="도입" id="{0e5f7c22-c29d-66fa-bafc-0d61a7bba784}">
           <p14:sldIdLst>
             <p14:sldId id="256"/>
             <p14:sldId id="257"/>
           </p14:sldIdLst>
         </p14:section>
-        <p14:section name="개념" id="{c0f75647-0181-3e03-2f30-412908b595e6}">
+        <p14:section name="개념" id="{98407232-7612-5f04-84f6-015fb176e2d2}">
           <p14:sldIdLst>
             <p14:sldId id="258"/>
             <p14:sldId id="259"/>
@@ -138,32 +138,32 @@
             <p14:sldId id="265"/>
           </p14:sldIdLst>
         </p14:section>
-        <p14:section name="연습" id="{79ace1ee-77a7-2465-15ec-297ffbaa58e1}">
+        <p14:section name="연습" id="{fcbbb922-1d5d-f728-5544-7c9de1d55271}">
           <p14:sldIdLst>
             <p14:sldId id="262"/>
             <p14:sldId id="263"/>
             <p14:sldId id="266"/>
           </p14:sldIdLst>
         </p14:section>
-        <p14:section name="개념" id="{3607a26c-c99b-079a-8415-b1a2b7d20660}">
+        <p14:section name="개념" id="{6c428c0f-9b84-c080-ffa4-a432142ce730}">
           <p14:sldIdLst/>
         </p14:section>
-        <p14:section name="연습" id="{cdca0a1e-e560-e227-4125-2d03182efeb3}">
+        <p14:section name="연습" id="{de8f4946-3d86-9208-9eff-9a4eeeab1a83}">
           <p14:sldIdLst/>
         </p14:section>
-        <p14:section name="확인" id="{6ec9841e-2968-9cf0-4258-1dfc15633592}">
+        <p14:section name="확인" id="{132b0b97-3f75-468f-1af7-4a87a4bd1f6d}">
           <p14:sldIdLst>
             <p14:sldId id="267"/>
             <p14:sldId id="268"/>
             <p14:sldId id="269"/>
           </p14:sldIdLst>
         </p14:section>
-        <p14:section name="정리" id="{a20d0d03-91ae-bad1-36c0-c5e58a5491ee}">
+        <p14:section name="정리" id="{6513f7cd-e706-c7be-6d7e-731807023e0e}">
           <p14:sldIdLst>
             <p14:sldId id="270"/>
           </p14:sldIdLst>
         </p14:section>
-        <p14:section name="보충" id="{eba5950c-6233-60ac-7307-4d3e51a338e5}">
+        <p14:section name="보충" id="{cb0b2f92-373c-48cc-5ce7-f9f994c4de44}">
           <p14:sldIdLst>
             <p14:sldId id="271"/>
           </p14:sldIdLst>

--- a/dist/초3/수학/도형과측정/초3_수학_도형과측정_07_무게.pptx
+++ b/dist/초3/수학/도형과측정/초3_수학_도형과측정_07_무게.pptx
@@ -122,13 +122,13 @@
   <p:extLst>
     <p:ext uri="{521415D9-36F7-43E2-AB2F-B90AF26B5E84}">
       <p14:sectionLst xmlns:p14="http://schemas.microsoft.com/office/powerpoint/2010/main">
-        <p14:section name="도입" id="{0e5f7c22-c29d-66fa-bafc-0d61a7bba784}">
+        <p14:section name="도입" id="{47f0fe35-c275-1484-dcf3-103ee98dffa9}">
           <p14:sldIdLst>
             <p14:sldId id="256"/>
             <p14:sldId id="257"/>
           </p14:sldIdLst>
         </p14:section>
-        <p14:section name="개념" id="{98407232-7612-5f04-84f6-015fb176e2d2}">
+        <p14:section name="개념" id="{2d63cca5-fa00-8150-b44c-0b1e2de37986}">
           <p14:sldIdLst>
             <p14:sldId id="258"/>
             <p14:sldId id="259"/>
@@ -138,32 +138,32 @@
             <p14:sldId id="265"/>
           </p14:sldIdLst>
         </p14:section>
-        <p14:section name="연습" id="{fcbbb922-1d5d-f728-5544-7c9de1d55271}">
+        <p14:section name="연습" id="{2a87374a-0940-5de1-62b9-13a405754568}">
           <p14:sldIdLst>
             <p14:sldId id="262"/>
             <p14:sldId id="263"/>
             <p14:sldId id="266"/>
           </p14:sldIdLst>
         </p14:section>
-        <p14:section name="개념" id="{6c428c0f-9b84-c080-ffa4-a432142ce730}">
+        <p14:section name="개념" id="{13ab4e04-9498-117d-7e98-8adc240142c1}">
           <p14:sldIdLst/>
         </p14:section>
-        <p14:section name="연습" id="{de8f4946-3d86-9208-9eff-9a4eeeab1a83}">
+        <p14:section name="연습" id="{dcd0b937-3450-71cc-80e9-f21b4c132e8b}">
           <p14:sldIdLst/>
         </p14:section>
-        <p14:section name="확인" id="{132b0b97-3f75-468f-1af7-4a87a4bd1f6d}">
+        <p14:section name="확인" id="{9325ea2f-612f-6fc1-9c53-1fb9df5ef6a1}">
           <p14:sldIdLst>
             <p14:sldId id="267"/>
             <p14:sldId id="268"/>
             <p14:sldId id="269"/>
           </p14:sldIdLst>
         </p14:section>
-        <p14:section name="정리" id="{6513f7cd-e706-c7be-6d7e-731807023e0e}">
+        <p14:section name="정리" id="{963474c3-f777-f4b3-64d3-ed3eeaa74d1d}">
           <p14:sldIdLst>
             <p14:sldId id="270"/>
           </p14:sldIdLst>
         </p14:section>
-        <p14:section name="보충" id="{cb0b2f92-373c-48cc-5ce7-f9f994c4de44}">
+        <p14:section name="보충" id="{e7397b1f-84bd-346b-8e96-3e1193cb377e}">
           <p14:sldIdLst>
             <p14:sldId id="271"/>
           </p14:sldIdLst>
@@ -3806,8 +3806,8 @@
         </p:nvSpPr>
         <p:spPr>
           <a:xfrm>
-            <a:off x="9545955" y="1275143"/>
-            <a:ext cx="201930" cy="174625"/>
+            <a:off x="9554337" y="1291018"/>
+            <a:ext cx="185166" cy="142875"/>
           </a:xfrm>
           <a:prstGeom prst="rect">
             <a:avLst/>
@@ -3823,7 +3823,7 @@
               <a:buNone/>
             </a:pPr>
             <a:r>
-              <a:rPr lang="ko-KR" altLang="en-US" sz="1100" b="1" dirty="0">
+              <a:rPr lang="ko-KR" altLang="en-US" sz="900" b="1" dirty="0">
                 <a:solidFill>
                   <a:srgbClr val="1F2937"/>
                 </a:solidFill>
@@ -3833,7 +3833,7 @@
               </a:rPr>
               <a:t>0</a:t>
             </a:r>
-            <a:endParaRPr lang="ko-KR" sz="1100" dirty="0"/>
+            <a:endParaRPr lang="ko-KR" sz="900" dirty="0"/>
           </a:p>
         </p:txBody>
       </p:sp>
@@ -3845,8 +3845,8 @@
         </p:nvSpPr>
         <p:spPr>
           <a:xfrm>
-            <a:off x="10194417" y="2015807"/>
-            <a:ext cx="386334" cy="174625"/>
+            <a:off x="10219563" y="2031682"/>
+            <a:ext cx="336042" cy="142875"/>
           </a:xfrm>
           <a:prstGeom prst="rect">
             <a:avLst/>
@@ -3862,7 +3862,7 @@
               <a:buNone/>
             </a:pPr>
             <a:r>
-              <a:rPr lang="ko-KR" altLang="en-US" sz="1100" b="1" dirty="0">
+              <a:rPr lang="ko-KR" altLang="en-US" sz="900" b="1" dirty="0">
                 <a:solidFill>
                   <a:srgbClr val="1F2937"/>
                 </a:solidFill>
@@ -3872,7 +3872,7 @@
               </a:rPr>
               <a:t>500</a:t>
             </a:r>
-            <a:endParaRPr lang="ko-KR" sz="1100" dirty="0"/>
+            <a:endParaRPr lang="ko-KR" sz="900" dirty="0"/>
           </a:p>
         </p:txBody>
       </p:sp>
@@ -3884,8 +3884,8 @@
         </p:nvSpPr>
         <p:spPr>
           <a:xfrm>
-            <a:off x="9407652" y="2756472"/>
-            <a:ext cx="478536" cy="174625"/>
+            <a:off x="9441180" y="2772347"/>
+            <a:ext cx="411480" cy="142875"/>
           </a:xfrm>
           <a:prstGeom prst="rect">
             <a:avLst/>
@@ -3901,7 +3901,7 @@
               <a:buNone/>
             </a:pPr>
             <a:r>
-              <a:rPr lang="ko-KR" altLang="en-US" sz="1100" b="1" dirty="0">
+              <a:rPr lang="ko-KR" altLang="en-US" sz="900" b="1" dirty="0">
                 <a:solidFill>
                   <a:srgbClr val="1F2937"/>
                 </a:solidFill>
@@ -3911,7 +3911,7 @@
               </a:rPr>
               <a:t>1000</a:t>
             </a:r>
-            <a:endParaRPr lang="ko-KR" sz="1100" dirty="0"/>
+            <a:endParaRPr lang="ko-KR" sz="900" dirty="0"/>
           </a:p>
         </p:txBody>
       </p:sp>
@@ -3923,8 +3923,8 @@
         </p:nvSpPr>
         <p:spPr>
           <a:xfrm>
-            <a:off x="8666988" y="2015807"/>
-            <a:ext cx="478536" cy="174625"/>
+            <a:off x="8700516" y="2031682"/>
+            <a:ext cx="411480" cy="142875"/>
           </a:xfrm>
           <a:prstGeom prst="rect">
             <a:avLst/>
@@ -3940,7 +3940,7 @@
               <a:buNone/>
             </a:pPr>
             <a:r>
-              <a:rPr lang="ko-KR" altLang="en-US" sz="1100" b="1" dirty="0">
+              <a:rPr lang="ko-KR" altLang="en-US" sz="900" b="1" dirty="0">
                 <a:solidFill>
                   <a:srgbClr val="1F2937"/>
                 </a:solidFill>
@@ -3950,7 +3950,7 @@
               </a:rPr>
               <a:t>1500</a:t>
             </a:r>
-            <a:endParaRPr lang="ko-KR" sz="1100" dirty="0"/>
+            <a:endParaRPr lang="ko-KR" sz="900" dirty="0"/>
           </a:p>
         </p:txBody>
       </p:sp>
@@ -3962,8 +3962,8 @@
         </p:nvSpPr>
         <p:spPr>
           <a:xfrm>
-            <a:off x="9469120" y="1631759"/>
-            <a:ext cx="355600" cy="174625"/>
+            <a:off x="9491472" y="1647635"/>
+            <a:ext cx="310896" cy="142875"/>
           </a:xfrm>
           <a:prstGeom prst="rect">
             <a:avLst/>
@@ -3979,7 +3979,7 @@
               <a:buNone/>
             </a:pPr>
             <a:r>
-              <a:rPr lang="en-US" altLang="ko-KR" sz="1100" b="1" dirty="0">
+              <a:rPr lang="en-US" altLang="ko-KR" sz="900" b="1" dirty="0">
                 <a:solidFill>
                   <a:srgbClr val="1F2937"/>
                 </a:solidFill>
@@ -3989,7 +3989,7 @@
               </a:rPr>
               <a:t>(g)</a:t>
             </a:r>
-            <a:endParaRPr lang="ko-KR" sz="1100" dirty="0"/>
+            <a:endParaRPr lang="ko-KR" sz="900" dirty="0"/>
           </a:p>
         </p:txBody>
       </p:sp>
@@ -9361,7 +9361,7 @@
                 <a:ea typeface="맑은 고딕" pitchFamily="34" charset="-122"/>
                 <a:cs typeface="맑은 고딕" pitchFamily="34" charset="-120"/>
               </a:rPr>
-              <a:t>다음 시간: 그림그래프</a:t>
+              <a:t>다음 시간: 길이의 덧셈과 뺄셈</a:t>
             </a:r>
             <a:endParaRPr lang="ko-KR" sz="2400" dirty="0"/>
           </a:p>
